--- a/media/resources/files/Ekvivalenettuuluk_Kaytalanuuchu_Onduktardy_Bolchokko_KatanyTap.pptx
+++ b/media/resources/files/Ekvivalenettuuluk_Kaytalanuuchu_Onduktardy_Bolchokko_KatanyTap.pptx
@@ -5430,7 +5430,7 @@
             </a:pPr>
             <a:r>
               <a:rPr lang="ru-RU" sz="2800" dirty="0"/>
-              <a:t>Турдуу пикирлер учун ыраазычылык билдиребиз.</a:t>
+              <a:t>Түрдүү пикирлер үчүн ыраазычылык билдиребиз.</a:t>
             </a:r>
           </a:p>
           <a:p>
